--- a/modules/Data_Summarization/Data_Summarization.pptx
+++ b/modules/Data_Summarization/Data_Summarization.pptx
@@ -3361,11 +3361,20 @@
               <a:rPr>
                 <a:latin typeface="Courier"/>
               </a:rPr>
-              <a:t>summarize</a:t>
-            </a:r>
-            <a:r>
-              <a:rPr/>
-              <a:t> works on datasets without </a:t>
+              <a:t>summarize()</a:t>
+            </a:r>
+            <a:r>
+              <a:rPr/>
+              <a:t> is special!</a:t>
+            </a:r>
+          </a:p>
+          <a:p>
+            <a:pPr lvl="0" marL="0" indent="0">
+              <a:buNone/>
+            </a:pPr>
+            <a:r>
+              <a:rPr/>
+              <a:t>It works on datasets without </a:t>
             </a:r>
             <a:r>
               <a:rPr>
@@ -6562,10 +6571,16 @@
               <a:t> </a:t>
             </a:r>
             <a:r>
-              <a:rPr>
-                <a:latin typeface="Courier"/>
-              </a:rPr>
-              <a:t>|&gt;</a:t>
+              <a:rPr/>
+              <a:t>the</a:t>
+            </a:r>
+            <a:r>
+              <a:rPr/>
+              <a:t> </a:t>
+            </a:r>
+            <a:r>
+              <a:rPr/>
+              <a:t>pipe</a:t>
             </a:r>
             <a:r>
               <a:rPr/>
@@ -11759,24 +11774,6 @@
             <a:r>
               <a:rPr/>
               <a:t>Pipe</a:t>
-            </a:r>
-            <a:r>
-              <a:rPr/>
-              <a:t> </a:t>
-            </a:r>
-            <a:r>
-              <a:rPr/>
-              <a:t>(</a:t>
-            </a:r>
-            <a:r>
-              <a:rPr>
-                <a:latin typeface="Courier"/>
-              </a:rPr>
-              <a:t>|&gt;</a:t>
-            </a:r>
-            <a:r>
-              <a:rPr/>
-              <a:t>)</a:t>
             </a:r>
             <a:r>
               <a:rPr/>
